--- a/dist/초5/영어/이해와읽기/초5_영어_이해와읽기_01_중심내용찾기.pptx
+++ b/dist/초5/영어/이해와읽기/초5_영어_이해와읽기_01_중심내용찾기.pptx
@@ -121,20 +121,20 @@
   <p:extLst>
     <p:ext uri="{521415D9-36F7-43E2-AB2F-B90AF26B5E84}">
       <p14:sectionLst xmlns:p14="http://schemas.microsoft.com/office/powerpoint/2010/main">
-        <p14:section name="도입" id="{f28e5c58-fb3f-e434-4d99-b09e72a6b7fe}">
+        <p14:section name="도입" id="{b3e51d77-5953-f093-eb94-fe143f0a1eef}">
           <p14:sldIdLst>
             <p14:sldId id="256"/>
             <p14:sldId id="257"/>
           </p14:sldIdLst>
         </p14:section>
-        <p14:section name="개념" id="{820e574f-7de7-a83f-8c71-aa13a8bc45a8}">
+        <p14:section name="개념" id="{9e9cd4c0-7a3f-e398-fe88-cd6469ef1a18}">
           <p14:sldIdLst>
             <p14:sldId id="258"/>
             <p14:sldId id="259"/>
             <p14:sldId id="263"/>
           </p14:sldIdLst>
         </p14:section>
-        <p14:section name="연습" id="{79a9b824-0d67-2468-9884-c7854b842f26}">
+        <p14:section name="연습" id="{4621ad11-5e06-d237-b9c1-f7b38286a4ca}">
           <p14:sldIdLst>
             <p14:sldId id="260"/>
             <p14:sldId id="261"/>
@@ -142,13 +142,13 @@
             <p14:sldId id="264"/>
           </p14:sldIdLst>
         </p14:section>
-        <p14:section name="개념" id="{d3a453f5-7cd9-e9dc-c854-ee299736a2b1}">
+        <p14:section name="개념" id="{3defc7cd-3bcb-a2ce-ecfc-a800f56796b3}">
           <p14:sldIdLst/>
         </p14:section>
-        <p14:section name="연습" id="{da7768cb-e57b-4bc1-5843-e44d0b70dbc5}">
+        <p14:section name="연습" id="{81268112-c94e-3367-985d-535f8e7547c3}">
           <p14:sldIdLst/>
         </p14:section>
-        <p14:section name="확인" id="{cda96d11-f31e-00c6-346e-93ed48e60474}">
+        <p14:section name="확인" id="{276ae3d5-d678-1e23-4eda-77eb6fbad301}">
           <p14:sldIdLst>
             <p14:sldId id="265"/>
             <p14:sldId id="266"/>
@@ -156,12 +156,12 @@
             <p14:sldId id="268"/>
           </p14:sldIdLst>
         </p14:section>
-        <p14:section name="정리" id="{fa605b30-49ea-2ae4-907c-5904905636e0}">
+        <p14:section name="정리" id="{6a550fb5-eb4a-2405-d190-74510129f373}">
           <p14:sldIdLst>
             <p14:sldId id="269"/>
           </p14:sldIdLst>
         </p14:section>
-        <p14:section name="보충" id="{047390f3-9064-d2c6-bfe2-0ee4ee8923c8}">
+        <p14:section name="보충" id="{782270d4-408f-4735-84f5-67b56753dea0}">
           <p14:sldIdLst>
             <p14:sldId id="270"/>
           </p14:sldIdLst>
@@ -574,10 +574,10 @@
 목적: 모르는 낱말이 있어도 중심 내용을 찾을 수 있다는 것에 관심을 갖게 하고, 오늘 할 일을 알립니다.
 시간: 약 2분
 이렇게 말해 보세요
-- “친구 둘이 영어로 이야기하는데 soccer라는 말이 세 번이나 들렸어. 무슨 이야기를 하고 있을까?”
+- “친구 둘이 영어로 이야기하는데 pizza라는 말이 세 번이나 들렸어. 무슨 이야기를 하고 있을까?”
 - “모든 낱말을 다 몰라도 무엇에 관한 이야기인지 알 수 있어. 오늘은 영어 대화와 글에서 가장 중요한 내용, 중심 내용을 찾는 방법을 배울 거야.”
 예상 답
-- “축구 이야기요.”
+- “피자 이야기요.”
 주의
 - 오늘 듣기 대본은 화면에 없고 이 노트와 부모용 안내에만 있습니다. 부모님이 대본을 천천히 또박또박 두 번 읽어 주세요. 대화는 목소리를 조금 바꾸어 두 사람을 나타내면 좋습니다.
 - 수업 전에 교과서 디지털 자료나 사전 앱의 발음 듣기로 낯선 낱말(soccer, cute, sunny, park, favorite, season)을 미리 들어 두세요. 부모님 발음이 완벽하지 않아도 괜찮습니다.
@@ -674,7 +674,7 @@
 시간: 약 3분
 이렇게 말해 보세요
 - “이번에는 혼자 해 볼래? 보기를 먼저 읽고, 엄마(아빠)가 두 번 읽어 주면 골라 봐.”
-- 들려줄 대화 3(화면에 없음): Tom: Mom, it's sunny today. / Mom: Yes, it's a nice day. / Tom: Let's go to the park. / Mom: Okay. Let's ride our bikes to the park. / Tom: Great!
+- 들려줄 대화 3(화면에 없음): Tom: Mom, it's sunny today. / Mom: Yes, it's a nice day. / Tom: Let's go to the park. / Mom: OK. Let's ride our bikes to the park. / Tom: Great!
 - “무엇에 관한 대화야? 어떻게 알았어?”
 정답
 - 나(공원에 가기). park가 두 번 나오고, Let's go to the park.처럼 공원에 가자는 말로 이어집니다.
@@ -3179,7 +3179,7 @@
                 <a:ea typeface="맑은 고딕" pitchFamily="34" charset="-122"/>
                 <a:cs typeface="맑은 고딕" pitchFamily="34" charset="-120"/>
               </a:rPr>
-              <a:t>soccer</a:t>
+              <a:t>pizza</a:t>
             </a:r>
             <a:endParaRPr lang="ko-KR" sz="3200" dirty="0"/>
           </a:p>
@@ -3226,7 +3226,7 @@
                 <a:ea typeface="맑은 고딕" pitchFamily="34" charset="-122"/>
                 <a:cs typeface="맑은 고딕" pitchFamily="34" charset="-120"/>
               </a:rPr>
-              <a:t>soccer</a:t>
+              <a:t>pizza</a:t>
             </a:r>
             <a:endParaRPr lang="ko-KR" sz="3200" dirty="0"/>
           </a:p>
@@ -3273,7 +3273,7 @@
                 <a:ea typeface="맑은 고딕" pitchFamily="34" charset="-122"/>
                 <a:cs typeface="맑은 고딕" pitchFamily="34" charset="-120"/>
               </a:rPr>
-              <a:t>soccer</a:t>
+              <a:t>pizza</a:t>
             </a:r>
             <a:endParaRPr lang="ko-KR" sz="3200" dirty="0"/>
           </a:p>
